--- a/media/exports/reports/2025-10/people-helped.pptx
+++ b/media/exports/reports/2025-10/people-helped.pptx
@@ -156,7 +156,7 @@
             <c:idx val="1"/>
             <c:spPr>
               <a:solidFill>
-                <a:srgbClr val="7D8790"/>
+                <a:srgbClr val="0E9F6E"/>
               </a:solidFill>
             </c:spPr>
           </c:dPt>
@@ -164,7 +164,7 @@
             <c:idx val="2"/>
             <c:spPr>
               <a:solidFill>
-                <a:srgbClr val="7D8790"/>
+                <a:srgbClr val="0E9F6E"/>
               </a:solidFill>
             </c:spPr>
           </c:dPt>
@@ -190,19 +190,19 @@
               <c:strCache>
                 <c:ptCount val="5"/>
                 <c:pt idx="0">
+                  <c:v>Emergency relief</c:v>
+                </c:pt>
+                <c:pt idx="1">
+                  <c:v>Community meals</c:v>
+                </c:pt>
+                <c:pt idx="2">
                   <c:v>Youth outreach</c:v>
                 </c:pt>
-                <c:pt idx="1">
-                  <c:v>Emergency relief</c:v>
-                </c:pt>
-                <c:pt idx="2">
-                  <c:v>Digital literacy</c:v>
-                </c:pt>
                 <c:pt idx="3">
-                  <c:v>Community meals</c:v>
+                  <c:v>Housing support</c:v>
                 </c:pt>
                 <c:pt idx="4">
-                  <c:v>Housing support</c:v>
+                  <c:v>Digital literacy</c:v>
                 </c:pt>
               </c:strCache>
             </c:strRef>
@@ -214,19 +214,19 @@
                 <c:formatCode>0.0"%";[Red](0.0"%")</c:formatCode>
                 <c:ptCount val="5"/>
                 <c:pt idx="0">
-                  <c:v>84.4</c:v>
+                  <c:v>87.9</c:v>
                 </c:pt>
                 <c:pt idx="1">
-                  <c:v>86.4</c:v>
+                  <c:v>90.1</c:v>
                 </c:pt>
                 <c:pt idx="2">
-                  <c:v>87.1</c:v>
+                  <c:v>90.2</c:v>
                 </c:pt>
                 <c:pt idx="3">
-                  <c:v>91.2</c:v>
+                  <c:v>93.5</c:v>
                 </c:pt>
                 <c:pt idx="4">
-                  <c:v>91.5</c:v>
+                  <c:v>98.2</c:v>
                 </c:pt>
               </c:numCache>
             </c:numRef>
@@ -290,7 +290,7 @@
       <c:valAx>
         <c:axId val="-2113994440"/>
         <c:scaling>
-          <c:max val="105.225"/>
+          <c:max val="112.92999999999999"/>
           <c:min val="0.0"/>
         </c:scaling>
         <c:delete/>
@@ -1033,7 +1033,7 @@
           <a:lstStyle/>
           <a:p>
             <a:r>
-              <a:t>How many people did we help this month, and how many couldn't we reach?. People helped, October: 506; Couldn't reach, October: 68; Share reached, October: 88.2%. 506 people were helped in October, and 68 came to a program but couldn't be helped: 88.2% reached (target 90.0%), against 89.9% in September. Youth outreach reached the smallest share: 84.4% (22 couldn't be helped). The main reason: program at capacity (30 people).</a:t>
+              <a:t>How many people did we help this month, and how many couldn't we reach?. People helped, October: 506; Couldn't reach, October: 50; Share reached, October: 91.0%. 506 people were helped in October, and 50 came to a program but couldn't be helped: 91.0% reached (target 90.0%), against 89.6% in September. Emergency relief reached the smallest share: 87.9% (14 couldn't be helped). The main reason: program at capacity (26 people).</a:t>
             </a:r>
           </a:p>
         </p:txBody>
@@ -4588,7 +4588,7 @@
                 </a:solidFill>
                 <a:latin typeface="Roboto"/>
               </a:rPr>
-              <a:t>Data retrieved 2pm, Tue 6 Oct 2026 · Generated 8 Oct 2026, 6:29pm · Sample data · Made with Python (python-pptx)</a:t>
+              <a:t>Data retrieved 2pm, Tue 6 Oct 2026 · Generated 8 Oct 2026, 11:41pm · Sample data · Made with Python (python-pptx)</a:t>
             </a:r>
           </a:p>
         </p:txBody>
@@ -5096,11 +5096,11 @@
             <a:r>
               <a:rPr sz="2200" b="1">
                 <a:solidFill>
-                  <a:srgbClr val="8A6D3B"/>
+                  <a:srgbClr val="2F7A5D"/>
                 </a:solidFill>
                 <a:latin typeface="Roboto"/>
               </a:rPr>
-              <a:t>68</a:t>
+              <a:t>50</a:t>
             </a:r>
           </a:p>
         </p:txBody>
@@ -5139,7 +5139,7 @@
                 </a:solidFill>
                 <a:latin typeface="Roboto"/>
               </a:rPr>
-              <a:t>September 53</a:t>
+              <a:t>September 55</a:t>
             </a:r>
           </a:p>
         </p:txBody>
@@ -5262,11 +5262,11 @@
             <a:r>
               <a:rPr sz="2200" b="1">
                 <a:solidFill>
-                  <a:srgbClr val="8A6D3B"/>
+                  <a:srgbClr val="2F7A5D"/>
                 </a:solidFill>
                 <a:latin typeface="Roboto"/>
               </a:rPr>
-              <a:t>88.2%</a:t>
+              <a:t>91.0%</a:t>
             </a:r>
           </a:p>
         </p:txBody>
@@ -5336,7 +5336,7 @@
         </p:nvCxnSpPr>
         <p:spPr>
           <a:xfrm>
-            <a:off x="9434827" y="2620868"/>
+            <a:off x="9053129" y="2620868"/>
             <a:ext cx="0" cy="2267834"/>
           </a:xfrm>
           <a:prstGeom prst="line">
@@ -5372,7 +5372,7 @@
         </p:nvSpPr>
         <p:spPr>
           <a:xfrm>
-            <a:off x="8337547" y="4888702"/>
+            <a:off x="7955849" y="4888702"/>
             <a:ext cx="2194560" cy="237744"/>
           </a:xfrm>
           <a:prstGeom prst="rect">
@@ -5525,7 +5525,7 @@
                 </a:solidFill>
                 <a:latin typeface="Roboto"/>
               </a:rPr>
-              <a:t>506 people were helped in October, and 68 came to a program but couldn't be helped: 88.2% reached (target 90.0%), against 89.9% in September.</a:t>
+              <a:t>506 people were helped in October, and 50 came to a program but couldn't be helped: 91.0% reached (target 90.0%), against 89.6% in September.</a:t>
             </a:r>
           </a:p>
         </p:txBody>
@@ -5652,7 +5652,7 @@
                 </a:solidFill>
                 <a:latin typeface="Roboto"/>
               </a:rPr>
-              <a:t>Youth outreach reached the smallest share: 84.4% (22 couldn't be helped). The main reason: program at capacity (30 people).</a:t>
+              <a:t>Emergency relief reached the smallest share: 87.9% (14 couldn't be helped). The main reason: program at capacity (26 people).</a:t>
             </a:r>
           </a:p>
         </p:txBody>
@@ -5730,7 +5730,7 @@
                 </a:solidFill>
                 <a:latin typeface="Roboto"/>
               </a:rPr>
-              <a:t>Data retrieved 2pm, Tue 6 Oct 2026 · Generated 8 Oct 2026, 6:29pm · Sample data · Made with Python (python-pptx)</a:t>
+              <a:t>Data retrieved 2pm, Tue 6 Oct 2026 · Generated 8 Oct 2026, 11:41pm · Sample data · Made with Python (python-pptx)</a:t>
             </a:r>
           </a:p>
         </p:txBody>
@@ -6045,7 +6045,7 @@
                 </a:solidFill>
                 <a:latin typeface="Roboto"/>
               </a:rPr>
-              <a:t>Data retrieved 2pm, Tue 6 Oct 2026 · Generated 8 Oct 2026, 6:29pm · Sample data · Made with Python (python-pptx)</a:t>
+              <a:t>Data retrieved 2pm, Tue 6 Oct 2026 · Generated 8 Oct 2026, 11:41pm · Sample data · Made with Python (python-pptx)</a:t>
             </a:r>
           </a:p>
         </p:txBody>
@@ -6353,7 +6353,7 @@
                           </a:solidFill>
                           <a:latin typeface="Roboto"/>
                         </a:rPr>
-                        <a:t>30</a:t>
+                        <a:t>26</a:t>
                       </a:r>
                     </a:p>
                   </a:txBody>
@@ -6409,7 +6409,119 @@
                           </a:solidFill>
                           <a:latin typeface="Roboto"/>
                         </a:rPr>
-                        <a:t>16</a:t>
+                        <a:t>12</a:t>
+                      </a:r>
+                    </a:p>
+                  </a:txBody>
+                  <a:tcPr>
+                    <a:solidFill>
+                      <a:srgbClr val="F7FAF7"/>
+                    </a:solidFill>
+                  </a:tcPr>
+                </a:tc>
+              </a:tr>
+              <a:tr h="310896">
+                <a:tc>
+                  <a:txBody>
+                    <a:bodyPr/>
+                    <a:lstStyle/>
+                    <a:p>
+                      <a:pPr algn="l">
+                        <a:defRPr>
+                          <a:latin typeface="Roboto"/>
+                        </a:defRPr>
+                      </a:pPr>
+                      <a:r>
+                        <a:rPr sz="1050">
+                          <a:solidFill>
+                            <a:srgbClr val="25342A"/>
+                          </a:solidFill>
+                          <a:latin typeface="Roboto"/>
+                        </a:rPr>
+                        <a:t>Not eligible</a:t>
+                      </a:r>
+                    </a:p>
+                  </a:txBody>
+                  <a:tcPr>
+                    <a:solidFill>
+                      <a:srgbClr val="FFFFFF"/>
+                    </a:solidFill>
+                  </a:tcPr>
+                </a:tc>
+                <a:tc>
+                  <a:txBody>
+                    <a:bodyPr/>
+                    <a:lstStyle/>
+                    <a:p>
+                      <a:pPr algn="r">
+                        <a:defRPr>
+                          <a:latin typeface="Roboto"/>
+                        </a:defRPr>
+                      </a:pPr>
+                      <a:r>
+                        <a:rPr sz="1050">
+                          <a:solidFill>
+                            <a:srgbClr val="25342A"/>
+                          </a:solidFill>
+                          <a:latin typeface="Roboto"/>
+                        </a:rPr>
+                        <a:t>6</a:t>
+                      </a:r>
+                    </a:p>
+                  </a:txBody>
+                  <a:tcPr>
+                    <a:solidFill>
+                      <a:srgbClr val="FFFFFF"/>
+                    </a:solidFill>
+                  </a:tcPr>
+                </a:tc>
+              </a:tr>
+              <a:tr h="310896">
+                <a:tc>
+                  <a:txBody>
+                    <a:bodyPr/>
+                    <a:lstStyle/>
+                    <a:p>
+                      <a:pPr algn="l">
+                        <a:defRPr>
+                          <a:latin typeface="Roboto"/>
+                        </a:defRPr>
+                      </a:pPr>
+                      <a:r>
+                        <a:rPr sz="1050">
+                          <a:solidFill>
+                            <a:srgbClr val="25342A"/>
+                          </a:solidFill>
+                          <a:latin typeface="Roboto"/>
+                        </a:rPr>
+                        <a:t>Outside the service area</a:t>
+                      </a:r>
+                    </a:p>
+                  </a:txBody>
+                  <a:tcPr>
+                    <a:solidFill>
+                      <a:srgbClr val="F7FAF7"/>
+                    </a:solidFill>
+                  </a:tcPr>
+                </a:tc>
+                <a:tc>
+                  <a:txBody>
+                    <a:bodyPr/>
+                    <a:lstStyle/>
+                    <a:p>
+                      <a:pPr algn="r">
+                        <a:defRPr>
+                          <a:latin typeface="Roboto"/>
+                        </a:defRPr>
+                      </a:pPr>
+                      <a:r>
+                        <a:rPr sz="1050">
+                          <a:solidFill>
+                            <a:srgbClr val="25342A"/>
+                          </a:solidFill>
+                          <a:latin typeface="Roboto"/>
+                        </a:rPr>
+                        <a:t>4</a:t>
                       </a:r>
                     </a:p>
                   </a:txBody>
@@ -6465,119 +6577,7 @@
                           </a:solidFill>
                           <a:latin typeface="Roboto"/>
                         </a:rPr>
-                        <a:t>9</a:t>
-                      </a:r>
-                    </a:p>
-                  </a:txBody>
-                  <a:tcPr>
-                    <a:solidFill>
-                      <a:srgbClr val="FFFFFF"/>
-                    </a:solidFill>
-                  </a:tcPr>
-                </a:tc>
-              </a:tr>
-              <a:tr h="310896">
-                <a:tc>
-                  <a:txBody>
-                    <a:bodyPr/>
-                    <a:lstStyle/>
-                    <a:p>
-                      <a:pPr algn="l">
-                        <a:defRPr>
-                          <a:latin typeface="Roboto"/>
-                        </a:defRPr>
-                      </a:pPr>
-                      <a:r>
-                        <a:rPr sz="1050">
-                          <a:solidFill>
-                            <a:srgbClr val="25342A"/>
-                          </a:solidFill>
-                          <a:latin typeface="Roboto"/>
-                        </a:rPr>
-                        <a:t>Not eligible</a:t>
-                      </a:r>
-                    </a:p>
-                  </a:txBody>
-                  <a:tcPr>
-                    <a:solidFill>
-                      <a:srgbClr val="F7FAF7"/>
-                    </a:solidFill>
-                  </a:tcPr>
-                </a:tc>
-                <a:tc>
-                  <a:txBody>
-                    <a:bodyPr/>
-                    <a:lstStyle/>
-                    <a:p>
-                      <a:pPr algn="r">
-                        <a:defRPr>
-                          <a:latin typeface="Roboto"/>
-                        </a:defRPr>
-                      </a:pPr>
-                      <a:r>
-                        <a:rPr sz="1050">
-                          <a:solidFill>
-                            <a:srgbClr val="25342A"/>
-                          </a:solidFill>
-                          <a:latin typeface="Roboto"/>
-                        </a:rPr>
-                        <a:t>8</a:t>
-                      </a:r>
-                    </a:p>
-                  </a:txBody>
-                  <a:tcPr>
-                    <a:solidFill>
-                      <a:srgbClr val="F7FAF7"/>
-                    </a:solidFill>
-                  </a:tcPr>
-                </a:tc>
-              </a:tr>
-              <a:tr h="310896">
-                <a:tc>
-                  <a:txBody>
-                    <a:bodyPr/>
-                    <a:lstStyle/>
-                    <a:p>
-                      <a:pPr algn="l">
-                        <a:defRPr>
-                          <a:latin typeface="Roboto"/>
-                        </a:defRPr>
-                      </a:pPr>
-                      <a:r>
-                        <a:rPr sz="1050">
-                          <a:solidFill>
-                            <a:srgbClr val="25342A"/>
-                          </a:solidFill>
-                          <a:latin typeface="Roboto"/>
-                        </a:rPr>
-                        <a:t>Outside the service area</a:t>
-                      </a:r>
-                    </a:p>
-                  </a:txBody>
-                  <a:tcPr>
-                    <a:solidFill>
-                      <a:srgbClr val="FFFFFF"/>
-                    </a:solidFill>
-                  </a:tcPr>
-                </a:tc>
-                <a:tc>
-                  <a:txBody>
-                    <a:bodyPr/>
-                    <a:lstStyle/>
-                    <a:p>
-                      <a:pPr algn="r">
-                        <a:defRPr>
-                          <a:latin typeface="Roboto"/>
-                        </a:defRPr>
-                      </a:pPr>
-                      <a:r>
-                        <a:rPr sz="1050">
-                          <a:solidFill>
-                            <a:srgbClr val="25342A"/>
-                          </a:solidFill>
-                          <a:latin typeface="Roboto"/>
-                        </a:rPr>
-                        <a:t>5</a:t>
+                        <a:t>2</a:t>
                       </a:r>
                     </a:p>
                   </a:txBody>
@@ -6665,7 +6665,7 @@
                 </a:solidFill>
                 <a:latin typeface="Roboto"/>
               </a:rPr>
-              <a:t>Data retrieved 2pm, Tue 6 Oct 2026 · Generated 8 Oct 2026, 6:29pm · Sample data · Made with Python (python-pptx)</a:t>
+              <a:t>Data retrieved 2pm, Tue 6 Oct 2026 · Generated 8 Oct 2026, 11:41pm · Sample data · Made with Python (python-pptx)</a:t>
             </a:r>
           </a:p>
         </p:txBody>

--- a/media/exports/reports/2025-10/people-helped.pptx
+++ b/media/exports/reports/2025-10/people-helped.pptx
@@ -963,7 +963,7 @@
           <a:lstStyle/>
           <a:p>
             <a:r>
-              <a:t>How many people did we help this month, and how many couldn't we reach?. Sample Community Services Ltd. Period: October 2025. People helped by each program, day by day, and the people who came to a program but couldn't be helped (and why). People helped are counted against each program's own grant spend.</a:t>
+              <a:t>How many people did we help this month, and how many couldn't we reach?. Sample Community Services Ltd. Period: October 2025. In short: 506 people helped in October; 50 couldn't be reached (91.0% reached, target 90.0%). People helped by each program, day by day, and the people who came to a program but couldn't be helped (and why). People helped are counted against each program's own grant spend.</a:t>
             </a:r>
           </a:p>
         </p:txBody>
@@ -4398,7 +4398,7 @@
         <p:spPr>
           <a:xfrm>
             <a:off x="457200" y="3703320"/>
-            <a:ext cx="11277295" cy="535940"/>
+            <a:ext cx="11277295" cy="758190"/>
           </a:xfrm>
           <a:prstGeom prst="rect">
             <a:avLst/>
@@ -4423,7 +4423,7 @@
                 </a:solidFill>
                 <a:latin typeface="Roboto"/>
               </a:rPr>
-              <a:t>Period: October 2025. People helped by each program, day by day, and the people who came to a program but couldn't be helped (and why). People helped are counted against each program's own grant spend.</a:t>
+              <a:t>Period: October 2025. In short: 506 people helped in October; 50 couldn't be reached (91.0% reached, target 90.0%). People helped by each program, day by day, and the people who came to a program but couldn't be helped (and why). People helped are counted against each program's own grant spend.</a:t>
             </a:r>
           </a:p>
         </p:txBody>
@@ -4436,7 +4436,7 @@
         </p:nvSpPr>
         <p:spPr>
           <a:xfrm>
-            <a:off x="457200" y="4330700"/>
+            <a:off x="457200" y="4552950"/>
             <a:ext cx="11277295" cy="1097280"/>
           </a:xfrm>
           <a:prstGeom prst="rect">
@@ -4588,7 +4588,7 @@
                 </a:solidFill>
                 <a:latin typeface="Roboto"/>
               </a:rPr>
-              <a:t>Data retrieved 2pm, Tue 6 Oct 2026 · Generated 8 Oct 2026, 11:41pm · Sample data · Made with Python (python-pptx)</a:t>
+              <a:t>Data retrieved 2pm, Tue 6 Oct 2026 · Generated 10 Oct 2026, 9:55pm · Sample data · Made with Python (python-pptx)</a:t>
             </a:r>
           </a:p>
         </p:txBody>
@@ -5730,7 +5730,7 @@
                 </a:solidFill>
                 <a:latin typeface="Roboto"/>
               </a:rPr>
-              <a:t>Data retrieved 2pm, Tue 6 Oct 2026 · Generated 8 Oct 2026, 11:41pm · Sample data · Made with Python (python-pptx)</a:t>
+              <a:t>Data retrieved 2pm, Tue 6 Oct 2026 · Generated 10 Oct 2026, 9:55pm · Sample data · Made with Python (python-pptx)</a:t>
             </a:r>
           </a:p>
         </p:txBody>
@@ -6045,7 +6045,7 @@
                 </a:solidFill>
                 <a:latin typeface="Roboto"/>
               </a:rPr>
-              <a:t>Data retrieved 2pm, Tue 6 Oct 2026 · Generated 8 Oct 2026, 11:41pm · Sample data · Made with Python (python-pptx)</a:t>
+              <a:t>Data retrieved 2pm, Tue 6 Oct 2026 · Generated 10 Oct 2026, 9:55pm · Sample data · Made with Python (python-pptx)</a:t>
             </a:r>
           </a:p>
         </p:txBody>
@@ -6665,7 +6665,7 @@
                 </a:solidFill>
                 <a:latin typeface="Roboto"/>
               </a:rPr>
-              <a:t>Data retrieved 2pm, Tue 6 Oct 2026 · Generated 8 Oct 2026, 11:41pm · Sample data · Made with Python (python-pptx)</a:t>
+              <a:t>Data retrieved 2pm, Tue 6 Oct 2026 · Generated 10 Oct 2026, 9:55pm · Sample data · Made with Python (python-pptx)</a:t>
             </a:r>
           </a:p>
         </p:txBody>
